--- a/docs/rom/decks/client/DUPE_Agentic_Business_Platform_HCLTech_v1_ES.pptx
+++ b/docs/rom/decks/client/DUPE_Agentic_Business_Platform_HCLTech_v1_ES.pptx
@@ -2099,7 +2099,7 @@
       </p:grpSpPr>
       <p:pic>
         <p:nvPicPr>
-          <p:cNvPr id="2" name="Image 0" descr="/sessions/sharp-elegant-brown/mnt/dupe/docs/rom/decks/title_bg.png">    </p:cNvPr>
+          <p:cNvPr id="2" name="Image 0" descr="/sessions/lucid-trusting-edison/mnt/dupe/docs/rom/decks/title_bg.png">    </p:cNvPr>
           <p:cNvPicPr>
             <a:picLocks noChangeAspect="1"/>
           </p:cNvPicPr>
